--- a/你是我的一切.pptx
+++ b/你是我的一切.pptx
@@ -171,10 +171,9 @@
           <a:lstStyle/>
           <a:p>
             <a:r>
-              <a:rPr lang="zh-TW" altLang="en-US" smtClean="0"/>
+              <a:rPr lang="zh-TW" altLang="en-US"/>
               <a:t>按一下以編輯母片標題樣式</a:t>
             </a:r>
-            <a:endParaRPr lang="zh-TW" altLang="en-US"/>
           </a:p>
         </p:txBody>
       </p:sp>
@@ -290,10 +289,9 @@
           </a:lstStyle>
           <a:p>
             <a:r>
-              <a:rPr lang="zh-TW" altLang="en-US" smtClean="0"/>
+              <a:rPr lang="zh-TW" altLang="en-US"/>
               <a:t>按一下以編輯母片副標題樣式</a:t>
             </a:r>
-            <a:endParaRPr lang="zh-TW" altLang="en-US"/>
           </a:p>
         </p:txBody>
       </p:sp>
@@ -315,7 +313,7 @@
             <a:fld id="{F4C0ED8C-69B4-47DE-B78F-544662AD9AC7}" type="datetimeFigureOut">
               <a:rPr lang="zh-TW" altLang="en-US" smtClean="0"/>
               <a:pPr/>
-              <a:t>2021/7/2</a:t>
+              <a:t>2024/8/24</a:t>
             </a:fld>
             <a:endParaRPr lang="zh-TW" altLang="en-US"/>
           </a:p>
@@ -405,10 +403,9 @@
           <a:lstStyle/>
           <a:p>
             <a:r>
-              <a:rPr lang="zh-TW" altLang="en-US" smtClean="0"/>
+              <a:rPr lang="zh-TW" altLang="en-US"/>
               <a:t>按一下以編輯母片標題樣式</a:t>
             </a:r>
-            <a:endParaRPr lang="zh-TW" altLang="en-US"/>
           </a:p>
         </p:txBody>
       </p:sp>
@@ -429,38 +426,37 @@
           <a:p>
             <a:pPr lvl="0"/>
             <a:r>
-              <a:rPr lang="zh-TW" altLang="en-US" smtClean="0"/>
+              <a:rPr lang="zh-TW" altLang="en-US"/>
               <a:t>按一下以編輯母片文字樣式</a:t>
             </a:r>
           </a:p>
           <a:p>
             <a:pPr lvl="1"/>
             <a:r>
-              <a:rPr lang="zh-TW" altLang="en-US" smtClean="0"/>
+              <a:rPr lang="zh-TW" altLang="en-US"/>
               <a:t>第二層</a:t>
             </a:r>
           </a:p>
           <a:p>
             <a:pPr lvl="2"/>
             <a:r>
-              <a:rPr lang="zh-TW" altLang="en-US" smtClean="0"/>
+              <a:rPr lang="zh-TW" altLang="en-US"/>
               <a:t>第三層</a:t>
             </a:r>
           </a:p>
           <a:p>
             <a:pPr lvl="3"/>
             <a:r>
-              <a:rPr lang="zh-TW" altLang="en-US" smtClean="0"/>
+              <a:rPr lang="zh-TW" altLang="en-US"/>
               <a:t>第四層</a:t>
             </a:r>
           </a:p>
           <a:p>
             <a:pPr lvl="4"/>
             <a:r>
-              <a:rPr lang="zh-TW" altLang="en-US" smtClean="0"/>
+              <a:rPr lang="zh-TW" altLang="en-US"/>
               <a:t>第五層</a:t>
             </a:r>
-            <a:endParaRPr lang="zh-TW" altLang="en-US"/>
           </a:p>
         </p:txBody>
       </p:sp>
@@ -482,7 +478,7 @@
             <a:fld id="{F4C0ED8C-69B4-47DE-B78F-544662AD9AC7}" type="datetimeFigureOut">
               <a:rPr lang="zh-TW" altLang="en-US" smtClean="0"/>
               <a:pPr/>
-              <a:t>2021/7/2</a:t>
+              <a:t>2024/8/24</a:t>
             </a:fld>
             <a:endParaRPr lang="zh-TW" altLang="en-US"/>
           </a:p>
@@ -577,10 +573,9 @@
           <a:lstStyle/>
           <a:p>
             <a:r>
-              <a:rPr lang="zh-TW" altLang="en-US" smtClean="0"/>
+              <a:rPr lang="zh-TW" altLang="en-US"/>
               <a:t>按一下以編輯母片標題樣式</a:t>
             </a:r>
-            <a:endParaRPr lang="zh-TW" altLang="en-US"/>
           </a:p>
         </p:txBody>
       </p:sp>
@@ -606,38 +601,37 @@
           <a:p>
             <a:pPr lvl="0"/>
             <a:r>
-              <a:rPr lang="zh-TW" altLang="en-US" smtClean="0"/>
+              <a:rPr lang="zh-TW" altLang="en-US"/>
               <a:t>按一下以編輯母片文字樣式</a:t>
             </a:r>
           </a:p>
           <a:p>
             <a:pPr lvl="1"/>
             <a:r>
-              <a:rPr lang="zh-TW" altLang="en-US" smtClean="0"/>
+              <a:rPr lang="zh-TW" altLang="en-US"/>
               <a:t>第二層</a:t>
             </a:r>
           </a:p>
           <a:p>
             <a:pPr lvl="2"/>
             <a:r>
-              <a:rPr lang="zh-TW" altLang="en-US" smtClean="0"/>
+              <a:rPr lang="zh-TW" altLang="en-US"/>
               <a:t>第三層</a:t>
             </a:r>
           </a:p>
           <a:p>
             <a:pPr lvl="3"/>
             <a:r>
-              <a:rPr lang="zh-TW" altLang="en-US" smtClean="0"/>
+              <a:rPr lang="zh-TW" altLang="en-US"/>
               <a:t>第四層</a:t>
             </a:r>
           </a:p>
           <a:p>
             <a:pPr lvl="4"/>
             <a:r>
-              <a:rPr lang="zh-TW" altLang="en-US" smtClean="0"/>
+              <a:rPr lang="zh-TW" altLang="en-US"/>
               <a:t>第五層</a:t>
             </a:r>
-            <a:endParaRPr lang="zh-TW" altLang="en-US"/>
           </a:p>
         </p:txBody>
       </p:sp>
@@ -659,7 +653,7 @@
             <a:fld id="{F4C0ED8C-69B4-47DE-B78F-544662AD9AC7}" type="datetimeFigureOut">
               <a:rPr lang="zh-TW" altLang="en-US" smtClean="0"/>
               <a:pPr/>
-              <a:t>2021/7/2</a:t>
+              <a:t>2024/8/24</a:t>
             </a:fld>
             <a:endParaRPr lang="zh-TW" altLang="en-US"/>
           </a:p>
@@ -749,10 +743,9 @@
           <a:lstStyle/>
           <a:p>
             <a:r>
-              <a:rPr lang="zh-TW" altLang="en-US" smtClean="0"/>
+              <a:rPr lang="zh-TW" altLang="en-US"/>
               <a:t>按一下以編輯母片標題樣式</a:t>
             </a:r>
-            <a:endParaRPr lang="zh-TW" altLang="en-US"/>
           </a:p>
         </p:txBody>
       </p:sp>
@@ -773,38 +766,37 @@
           <a:p>
             <a:pPr lvl="0"/>
             <a:r>
-              <a:rPr lang="zh-TW" altLang="en-US" smtClean="0"/>
+              <a:rPr lang="zh-TW" altLang="en-US"/>
               <a:t>按一下以編輯母片文字樣式</a:t>
             </a:r>
           </a:p>
           <a:p>
             <a:pPr lvl="1"/>
             <a:r>
-              <a:rPr lang="zh-TW" altLang="en-US" smtClean="0"/>
+              <a:rPr lang="zh-TW" altLang="en-US"/>
               <a:t>第二層</a:t>
             </a:r>
           </a:p>
           <a:p>
             <a:pPr lvl="2"/>
             <a:r>
-              <a:rPr lang="zh-TW" altLang="en-US" smtClean="0"/>
+              <a:rPr lang="zh-TW" altLang="en-US"/>
               <a:t>第三層</a:t>
             </a:r>
           </a:p>
           <a:p>
             <a:pPr lvl="3"/>
             <a:r>
-              <a:rPr lang="zh-TW" altLang="en-US" smtClean="0"/>
+              <a:rPr lang="zh-TW" altLang="en-US"/>
               <a:t>第四層</a:t>
             </a:r>
           </a:p>
           <a:p>
             <a:pPr lvl="4"/>
             <a:r>
-              <a:rPr lang="zh-TW" altLang="en-US" smtClean="0"/>
+              <a:rPr lang="zh-TW" altLang="en-US"/>
               <a:t>第五層</a:t>
             </a:r>
-            <a:endParaRPr lang="zh-TW" altLang="en-US"/>
           </a:p>
         </p:txBody>
       </p:sp>
@@ -826,7 +818,7 @@
             <a:fld id="{F4C0ED8C-69B4-47DE-B78F-544662AD9AC7}" type="datetimeFigureOut">
               <a:rPr lang="zh-TW" altLang="en-US" smtClean="0"/>
               <a:pPr/>
-              <a:t>2021/7/2</a:t>
+              <a:t>2024/8/24</a:t>
             </a:fld>
             <a:endParaRPr lang="zh-TW" altLang="en-US"/>
           </a:p>
@@ -925,10 +917,9 @@
           </a:lstStyle>
           <a:p>
             <a:r>
-              <a:rPr lang="zh-TW" altLang="en-US" smtClean="0"/>
+              <a:rPr lang="zh-TW" altLang="en-US"/>
               <a:t>按一下以編輯母片標題樣式</a:t>
             </a:r>
-            <a:endParaRPr lang="zh-TW" altLang="en-US"/>
           </a:p>
         </p:txBody>
       </p:sp>
@@ -1045,7 +1036,7 @@
           <a:p>
             <a:pPr lvl="0"/>
             <a:r>
-              <a:rPr lang="zh-TW" altLang="en-US" smtClean="0"/>
+              <a:rPr lang="zh-TW" altLang="en-US"/>
               <a:t>按一下以編輯母片文字樣式</a:t>
             </a:r>
           </a:p>
@@ -1069,7 +1060,7 @@
             <a:fld id="{F4C0ED8C-69B4-47DE-B78F-544662AD9AC7}" type="datetimeFigureOut">
               <a:rPr lang="zh-TW" altLang="en-US" smtClean="0"/>
               <a:pPr/>
-              <a:t>2021/7/2</a:t>
+              <a:t>2024/8/24</a:t>
             </a:fld>
             <a:endParaRPr lang="zh-TW" altLang="en-US"/>
           </a:p>
@@ -1159,10 +1150,9 @@
           <a:lstStyle/>
           <a:p>
             <a:r>
-              <a:rPr lang="zh-TW" altLang="en-US" smtClean="0"/>
+              <a:rPr lang="zh-TW" altLang="en-US"/>
               <a:t>按一下以編輯母片標題樣式</a:t>
             </a:r>
-            <a:endParaRPr lang="zh-TW" altLang="en-US"/>
           </a:p>
         </p:txBody>
       </p:sp>
@@ -1216,38 +1206,37 @@
           <a:p>
             <a:pPr lvl="0"/>
             <a:r>
-              <a:rPr lang="zh-TW" altLang="en-US" smtClean="0"/>
+              <a:rPr lang="zh-TW" altLang="en-US"/>
               <a:t>按一下以編輯母片文字樣式</a:t>
             </a:r>
           </a:p>
           <a:p>
             <a:pPr lvl="1"/>
             <a:r>
-              <a:rPr lang="zh-TW" altLang="en-US" smtClean="0"/>
+              <a:rPr lang="zh-TW" altLang="en-US"/>
               <a:t>第二層</a:t>
             </a:r>
           </a:p>
           <a:p>
             <a:pPr lvl="2"/>
             <a:r>
-              <a:rPr lang="zh-TW" altLang="en-US" smtClean="0"/>
+              <a:rPr lang="zh-TW" altLang="en-US"/>
               <a:t>第三層</a:t>
             </a:r>
           </a:p>
           <a:p>
             <a:pPr lvl="3"/>
             <a:r>
-              <a:rPr lang="zh-TW" altLang="en-US" smtClean="0"/>
+              <a:rPr lang="zh-TW" altLang="en-US"/>
               <a:t>第四層</a:t>
             </a:r>
           </a:p>
           <a:p>
             <a:pPr lvl="4"/>
             <a:r>
-              <a:rPr lang="zh-TW" altLang="en-US" smtClean="0"/>
+              <a:rPr lang="zh-TW" altLang="en-US"/>
               <a:t>第五層</a:t>
             </a:r>
-            <a:endParaRPr lang="zh-TW" altLang="en-US"/>
           </a:p>
         </p:txBody>
       </p:sp>
@@ -1301,38 +1290,37 @@
           <a:p>
             <a:pPr lvl="0"/>
             <a:r>
-              <a:rPr lang="zh-TW" altLang="en-US" smtClean="0"/>
+              <a:rPr lang="zh-TW" altLang="en-US"/>
               <a:t>按一下以編輯母片文字樣式</a:t>
             </a:r>
           </a:p>
           <a:p>
             <a:pPr lvl="1"/>
             <a:r>
-              <a:rPr lang="zh-TW" altLang="en-US" smtClean="0"/>
+              <a:rPr lang="zh-TW" altLang="en-US"/>
               <a:t>第二層</a:t>
             </a:r>
           </a:p>
           <a:p>
             <a:pPr lvl="2"/>
             <a:r>
-              <a:rPr lang="zh-TW" altLang="en-US" smtClean="0"/>
+              <a:rPr lang="zh-TW" altLang="en-US"/>
               <a:t>第三層</a:t>
             </a:r>
           </a:p>
           <a:p>
             <a:pPr lvl="3"/>
             <a:r>
-              <a:rPr lang="zh-TW" altLang="en-US" smtClean="0"/>
+              <a:rPr lang="zh-TW" altLang="en-US"/>
               <a:t>第四層</a:t>
             </a:r>
           </a:p>
           <a:p>
             <a:pPr lvl="4"/>
             <a:r>
-              <a:rPr lang="zh-TW" altLang="en-US" smtClean="0"/>
+              <a:rPr lang="zh-TW" altLang="en-US"/>
               <a:t>第五層</a:t>
             </a:r>
-            <a:endParaRPr lang="zh-TW" altLang="en-US"/>
           </a:p>
         </p:txBody>
       </p:sp>
@@ -1354,7 +1342,7 @@
             <a:fld id="{F4C0ED8C-69B4-47DE-B78F-544662AD9AC7}" type="datetimeFigureOut">
               <a:rPr lang="zh-TW" altLang="en-US" smtClean="0"/>
               <a:pPr/>
-              <a:t>2021/7/2</a:t>
+              <a:t>2024/8/24</a:t>
             </a:fld>
             <a:endParaRPr lang="zh-TW" altLang="en-US"/>
           </a:p>
@@ -1448,10 +1436,9 @@
           </a:lstStyle>
           <a:p>
             <a:r>
-              <a:rPr lang="zh-TW" altLang="en-US" smtClean="0"/>
+              <a:rPr lang="zh-TW" altLang="en-US"/>
               <a:t>按一下以編輯母片標題樣式</a:t>
             </a:r>
-            <a:endParaRPr lang="zh-TW" altLang="en-US"/>
           </a:p>
         </p:txBody>
       </p:sp>
@@ -1514,7 +1501,7 @@
           <a:p>
             <a:pPr lvl="0"/>
             <a:r>
-              <a:rPr lang="zh-TW" altLang="en-US" smtClean="0"/>
+              <a:rPr lang="zh-TW" altLang="en-US"/>
               <a:t>按一下以編輯母片文字樣式</a:t>
             </a:r>
           </a:p>
@@ -1570,38 +1557,37 @@
           <a:p>
             <a:pPr lvl="0"/>
             <a:r>
-              <a:rPr lang="zh-TW" altLang="en-US" smtClean="0"/>
+              <a:rPr lang="zh-TW" altLang="en-US"/>
               <a:t>按一下以編輯母片文字樣式</a:t>
             </a:r>
           </a:p>
           <a:p>
             <a:pPr lvl="1"/>
             <a:r>
-              <a:rPr lang="zh-TW" altLang="en-US" smtClean="0"/>
+              <a:rPr lang="zh-TW" altLang="en-US"/>
               <a:t>第二層</a:t>
             </a:r>
           </a:p>
           <a:p>
             <a:pPr lvl="2"/>
             <a:r>
-              <a:rPr lang="zh-TW" altLang="en-US" smtClean="0"/>
+              <a:rPr lang="zh-TW" altLang="en-US"/>
               <a:t>第三層</a:t>
             </a:r>
           </a:p>
           <a:p>
             <a:pPr lvl="3"/>
             <a:r>
-              <a:rPr lang="zh-TW" altLang="en-US" smtClean="0"/>
+              <a:rPr lang="zh-TW" altLang="en-US"/>
               <a:t>第四層</a:t>
             </a:r>
           </a:p>
           <a:p>
             <a:pPr lvl="4"/>
             <a:r>
-              <a:rPr lang="zh-TW" altLang="en-US" smtClean="0"/>
+              <a:rPr lang="zh-TW" altLang="en-US"/>
               <a:t>第五層</a:t>
             </a:r>
-            <a:endParaRPr lang="zh-TW" altLang="en-US"/>
           </a:p>
         </p:txBody>
       </p:sp>
@@ -1664,7 +1650,7 @@
           <a:p>
             <a:pPr lvl="0"/>
             <a:r>
-              <a:rPr lang="zh-TW" altLang="en-US" smtClean="0"/>
+              <a:rPr lang="zh-TW" altLang="en-US"/>
               <a:t>按一下以編輯母片文字樣式</a:t>
             </a:r>
           </a:p>
@@ -1720,38 +1706,37 @@
           <a:p>
             <a:pPr lvl="0"/>
             <a:r>
-              <a:rPr lang="zh-TW" altLang="en-US" smtClean="0"/>
+              <a:rPr lang="zh-TW" altLang="en-US"/>
               <a:t>按一下以編輯母片文字樣式</a:t>
             </a:r>
           </a:p>
           <a:p>
             <a:pPr lvl="1"/>
             <a:r>
-              <a:rPr lang="zh-TW" altLang="en-US" smtClean="0"/>
+              <a:rPr lang="zh-TW" altLang="en-US"/>
               <a:t>第二層</a:t>
             </a:r>
           </a:p>
           <a:p>
             <a:pPr lvl="2"/>
             <a:r>
-              <a:rPr lang="zh-TW" altLang="en-US" smtClean="0"/>
+              <a:rPr lang="zh-TW" altLang="en-US"/>
               <a:t>第三層</a:t>
             </a:r>
           </a:p>
           <a:p>
             <a:pPr lvl="3"/>
             <a:r>
-              <a:rPr lang="zh-TW" altLang="en-US" smtClean="0"/>
+              <a:rPr lang="zh-TW" altLang="en-US"/>
               <a:t>第四層</a:t>
             </a:r>
           </a:p>
           <a:p>
             <a:pPr lvl="4"/>
             <a:r>
-              <a:rPr lang="zh-TW" altLang="en-US" smtClean="0"/>
+              <a:rPr lang="zh-TW" altLang="en-US"/>
               <a:t>第五層</a:t>
             </a:r>
-            <a:endParaRPr lang="zh-TW" altLang="en-US"/>
           </a:p>
         </p:txBody>
       </p:sp>
@@ -1773,7 +1758,7 @@
             <a:fld id="{F4C0ED8C-69B4-47DE-B78F-544662AD9AC7}" type="datetimeFigureOut">
               <a:rPr lang="zh-TW" altLang="en-US" smtClean="0"/>
               <a:pPr/>
-              <a:t>2021/7/2</a:t>
+              <a:t>2024/8/24</a:t>
             </a:fld>
             <a:endParaRPr lang="zh-TW" altLang="en-US"/>
           </a:p>
@@ -1863,10 +1848,9 @@
           <a:lstStyle/>
           <a:p>
             <a:r>
-              <a:rPr lang="zh-TW" altLang="en-US" smtClean="0"/>
+              <a:rPr lang="zh-TW" altLang="en-US"/>
               <a:t>按一下以編輯母片標題樣式</a:t>
             </a:r>
-            <a:endParaRPr lang="zh-TW" altLang="en-US"/>
           </a:p>
         </p:txBody>
       </p:sp>
@@ -1888,7 +1872,7 @@
             <a:fld id="{F4C0ED8C-69B4-47DE-B78F-544662AD9AC7}" type="datetimeFigureOut">
               <a:rPr lang="zh-TW" altLang="en-US" smtClean="0"/>
               <a:pPr/>
-              <a:t>2021/7/2</a:t>
+              <a:t>2024/8/24</a:t>
             </a:fld>
             <a:endParaRPr lang="zh-TW" altLang="en-US"/>
           </a:p>
@@ -1980,7 +1964,7 @@
             <a:fld id="{F4C0ED8C-69B4-47DE-B78F-544662AD9AC7}" type="datetimeFigureOut">
               <a:rPr lang="zh-TW" altLang="en-US" smtClean="0"/>
               <a:pPr/>
-              <a:t>2021/7/2</a:t>
+              <a:t>2024/8/24</a:t>
             </a:fld>
             <a:endParaRPr lang="zh-TW" altLang="en-US"/>
           </a:p>
@@ -2079,10 +2063,9 @@
           </a:lstStyle>
           <a:p>
             <a:r>
-              <a:rPr lang="zh-TW" altLang="en-US" smtClean="0"/>
+              <a:rPr lang="zh-TW" altLang="en-US"/>
               <a:t>按一下以編輯母片標題樣式</a:t>
             </a:r>
-            <a:endParaRPr lang="zh-TW" altLang="en-US"/>
           </a:p>
         </p:txBody>
       </p:sp>
@@ -2136,38 +2119,37 @@
           <a:p>
             <a:pPr lvl="0"/>
             <a:r>
-              <a:rPr lang="zh-TW" altLang="en-US" smtClean="0"/>
+              <a:rPr lang="zh-TW" altLang="en-US"/>
               <a:t>按一下以編輯母片文字樣式</a:t>
             </a:r>
           </a:p>
           <a:p>
             <a:pPr lvl="1"/>
             <a:r>
-              <a:rPr lang="zh-TW" altLang="en-US" smtClean="0"/>
+              <a:rPr lang="zh-TW" altLang="en-US"/>
               <a:t>第二層</a:t>
             </a:r>
           </a:p>
           <a:p>
             <a:pPr lvl="2"/>
             <a:r>
-              <a:rPr lang="zh-TW" altLang="en-US" smtClean="0"/>
+              <a:rPr lang="zh-TW" altLang="en-US"/>
               <a:t>第三層</a:t>
             </a:r>
           </a:p>
           <a:p>
             <a:pPr lvl="3"/>
             <a:r>
-              <a:rPr lang="zh-TW" altLang="en-US" smtClean="0"/>
+              <a:rPr lang="zh-TW" altLang="en-US"/>
               <a:t>第四層</a:t>
             </a:r>
           </a:p>
           <a:p>
             <a:pPr lvl="4"/>
             <a:r>
-              <a:rPr lang="zh-TW" altLang="en-US" smtClean="0"/>
+              <a:rPr lang="zh-TW" altLang="en-US"/>
               <a:t>第五層</a:t>
             </a:r>
-            <a:endParaRPr lang="zh-TW" altLang="en-US"/>
           </a:p>
         </p:txBody>
       </p:sp>
@@ -2230,7 +2212,7 @@
           <a:p>
             <a:pPr lvl="0"/>
             <a:r>
-              <a:rPr lang="zh-TW" altLang="en-US" smtClean="0"/>
+              <a:rPr lang="zh-TW" altLang="en-US"/>
               <a:t>按一下以編輯母片文字樣式</a:t>
             </a:r>
           </a:p>
@@ -2254,7 +2236,7 @@
             <a:fld id="{F4C0ED8C-69B4-47DE-B78F-544662AD9AC7}" type="datetimeFigureOut">
               <a:rPr lang="zh-TW" altLang="en-US" smtClean="0"/>
               <a:pPr/>
-              <a:t>2021/7/2</a:t>
+              <a:t>2024/8/24</a:t>
             </a:fld>
             <a:endParaRPr lang="zh-TW" altLang="en-US"/>
           </a:p>
@@ -2353,10 +2335,9 @@
           </a:lstStyle>
           <a:p>
             <a:r>
-              <a:rPr lang="zh-TW" altLang="en-US" smtClean="0"/>
+              <a:rPr lang="zh-TW" altLang="en-US"/>
               <a:t>按一下以編輯母片標題樣式</a:t>
             </a:r>
-            <a:endParaRPr lang="zh-TW" altLang="en-US"/>
           </a:p>
         </p:txBody>
       </p:sp>
@@ -2418,10 +2399,9 @@
           </a:lstStyle>
           <a:p>
             <a:r>
-              <a:rPr lang="zh-TW" altLang="en-US" smtClean="0"/>
+              <a:rPr lang="zh-TW" altLang="en-US"/>
               <a:t>按一下圖示以新增圖片</a:t>
             </a:r>
-            <a:endParaRPr lang="zh-TW" altLang="en-US"/>
           </a:p>
         </p:txBody>
       </p:sp>
@@ -2484,7 +2464,7 @@
           <a:p>
             <a:pPr lvl="0"/>
             <a:r>
-              <a:rPr lang="zh-TW" altLang="en-US" smtClean="0"/>
+              <a:rPr lang="zh-TW" altLang="en-US"/>
               <a:t>按一下以編輯母片文字樣式</a:t>
             </a:r>
           </a:p>
@@ -2508,7 +2488,7 @@
             <a:fld id="{F4C0ED8C-69B4-47DE-B78F-544662AD9AC7}" type="datetimeFigureOut">
               <a:rPr lang="zh-TW" altLang="en-US" smtClean="0"/>
               <a:pPr/>
-              <a:t>2021/7/2</a:t>
+              <a:t>2024/8/24</a:t>
             </a:fld>
             <a:endParaRPr lang="zh-TW" altLang="en-US"/>
           </a:p>
@@ -2618,10 +2598,9 @@
           <a:lstStyle/>
           <a:p>
             <a:r>
-              <a:rPr lang="zh-TW" altLang="en-US" smtClean="0"/>
+              <a:rPr lang="zh-TW" altLang="en-US"/>
               <a:t>按一下以編輯母片標題樣式</a:t>
             </a:r>
-            <a:endParaRPr lang="zh-TW" altLang="en-US"/>
           </a:p>
         </p:txBody>
       </p:sp>
@@ -2652,38 +2631,37 @@
           <a:p>
             <a:pPr lvl="0"/>
             <a:r>
-              <a:rPr lang="zh-TW" altLang="en-US" smtClean="0"/>
+              <a:rPr lang="zh-TW" altLang="en-US"/>
               <a:t>按一下以編輯母片文字樣式</a:t>
             </a:r>
           </a:p>
           <a:p>
             <a:pPr lvl="1"/>
             <a:r>
-              <a:rPr lang="zh-TW" altLang="en-US" smtClean="0"/>
+              <a:rPr lang="zh-TW" altLang="en-US"/>
               <a:t>第二層</a:t>
             </a:r>
           </a:p>
           <a:p>
             <a:pPr lvl="2"/>
             <a:r>
-              <a:rPr lang="zh-TW" altLang="en-US" smtClean="0"/>
+              <a:rPr lang="zh-TW" altLang="en-US"/>
               <a:t>第三層</a:t>
             </a:r>
           </a:p>
           <a:p>
             <a:pPr lvl="3"/>
             <a:r>
-              <a:rPr lang="zh-TW" altLang="en-US" smtClean="0"/>
+              <a:rPr lang="zh-TW" altLang="en-US"/>
               <a:t>第四層</a:t>
             </a:r>
           </a:p>
           <a:p>
             <a:pPr lvl="4"/>
             <a:r>
-              <a:rPr lang="zh-TW" altLang="en-US" smtClean="0"/>
+              <a:rPr lang="zh-TW" altLang="en-US"/>
               <a:t>第五層</a:t>
             </a:r>
-            <a:endParaRPr lang="zh-TW" altLang="en-US"/>
           </a:p>
         </p:txBody>
       </p:sp>
@@ -2723,7 +2701,7 @@
             <a:fld id="{F4C0ED8C-69B4-47DE-B78F-544662AD9AC7}" type="datetimeFigureOut">
               <a:rPr lang="zh-TW" altLang="en-US" smtClean="0"/>
               <a:pPr/>
-              <a:t>2021/7/2</a:t>
+              <a:t>2024/8/24</a:t>
             </a:fld>
             <a:endParaRPr lang="zh-TW" altLang="en-US"/>
           </a:p>
@@ -3131,7 +3109,7 @@
                 <a:latin typeface="微軟正黑體" pitchFamily="34" charset="-120"/>
                 <a:ea typeface="微軟正黑體" pitchFamily="34" charset="-120"/>
               </a:rPr>
-              <a:t>袮</a:t>
+              <a:t>祢</a:t>
             </a:r>
             <a:r>
               <a:rPr lang="zh-TW" altLang="en-US" sz="7200" b="1" i="1" dirty="0">
@@ -3216,7 +3194,7 @@
                 <a:latin typeface="微軟正黑體" pitchFamily="34" charset="-120"/>
                 <a:ea typeface="微軟正黑體" pitchFamily="34" charset="-120"/>
               </a:rPr>
-              <a:t>袮</a:t>
+              <a:t>祢</a:t>
             </a:r>
             <a:r>
               <a:rPr lang="zh-TW" altLang="en-US" sz="6400" b="1" dirty="0">
@@ -3247,7 +3225,7 @@
         <p:spPr>
           <a:xfrm>
             <a:off x="0" y="5061182"/>
-            <a:ext cx="12192000" cy="830997"/>
+            <a:ext cx="12192000" cy="646331"/>
           </a:xfrm>
           <a:prstGeom prst="rect">
             <a:avLst/>
@@ -3262,19 +3240,40 @@
           <a:p>
             <a:pPr algn="ctr"/>
             <a:r>
-              <a:rPr lang="en-US" sz="4800" b="1" dirty="0">
-                <a:solidFill>
-                  <a:srgbClr val="660033"/>
-                </a:solidFill>
-                <a:effectLst/>
-              </a:rPr>
-              <a:t>( 2 )</a:t>
-            </a:r>
-            <a:endParaRPr lang="vi-VN" sz="4800" b="1" dirty="0">
+              <a:rPr lang="en-US" sz="3600" b="1" dirty="0">
+                <a:solidFill>
+                  <a:srgbClr val="660033"/>
+                </a:solidFill>
+                <a:latin typeface="Microsoft JhengHei" panose="020B0604030504040204" pitchFamily="34" charset="-120"/>
+                <a:ea typeface="Microsoft JhengHei" panose="020B0604030504040204" pitchFamily="34" charset="-120"/>
+              </a:rPr>
+              <a:t>( </a:t>
+            </a:r>
+            <a:r>
+              <a:rPr lang="zh-CN" altLang="en-US" sz="3600" b="1" dirty="0">
+                <a:solidFill>
+                  <a:srgbClr val="660033"/>
+                </a:solidFill>
+                <a:latin typeface="Microsoft JhengHei" panose="020B0604030504040204" pitchFamily="34" charset="-120"/>
+                <a:ea typeface="Microsoft JhengHei" panose="020B0604030504040204" pitchFamily="34" charset="-120"/>
+              </a:rPr>
+              <a:t>正歌 </a:t>
+            </a:r>
+            <a:r>
+              <a:rPr lang="en-US" sz="3600" b="1" dirty="0">
+                <a:solidFill>
+                  <a:srgbClr val="660033"/>
+                </a:solidFill>
+                <a:latin typeface="Microsoft JhengHei" panose="020B0604030504040204" pitchFamily="34" charset="-120"/>
+                <a:ea typeface="Microsoft JhengHei" panose="020B0604030504040204" pitchFamily="34" charset="-120"/>
+              </a:rPr>
+              <a:t>2 )</a:t>
+            </a:r>
+            <a:endParaRPr lang="vi-VN" sz="3600" b="1" dirty="0">
               <a:solidFill>
                 <a:srgbClr val="660033"/>
               </a:solidFill>
-              <a:effectLst/>
+              <a:ea typeface="Microsoft JhengHei" panose="020B0604030504040204" pitchFamily="34" charset="-120"/>
             </a:endParaRPr>
           </a:p>
         </p:txBody>
@@ -3406,12 +3405,77 @@
               </a:rPr>
               <a:t>配得大讚美</a:t>
             </a:r>
-            <a:endParaRPr lang="zh-TW" altLang="en-US" sz="6400" b="1" dirty="0">
+          </a:p>
+        </p:txBody>
+      </p:sp>
+      <p:sp>
+        <p:nvSpPr>
+          <p:cNvPr id="2" name="TextBox 1">
+            <a:extLst>
+              <a:ext uri="{FF2B5EF4-FFF2-40B4-BE49-F238E27FC236}">
+                <a16:creationId xmlns:a16="http://schemas.microsoft.com/office/drawing/2014/main" id="{2C45432F-8C6B-D6DC-6AD2-C283AFEE1DDA}"/>
+              </a:ext>
+            </a:extLst>
+          </p:cNvPr>
+          <p:cNvSpPr txBox="1"/>
+          <p:nvPr/>
+        </p:nvSpPr>
+        <p:spPr>
+          <a:xfrm>
+            <a:off x="0" y="5061182"/>
+            <a:ext cx="12192000" cy="646331"/>
+          </a:xfrm>
+          <a:prstGeom prst="rect">
+            <a:avLst/>
+          </a:prstGeom>
+          <a:noFill/>
+        </p:spPr>
+        <p:txBody>
+          <a:bodyPr wrap="square" rtlCol="0">
+            <a:spAutoFit/>
+          </a:bodyPr>
+          <a:lstStyle/>
+          <a:p>
+            <a:pPr algn="ctr"/>
+            <a:r>
+              <a:rPr lang="en-US" sz="3600" b="1" dirty="0">
+                <a:solidFill>
+                  <a:srgbClr val="660033"/>
+                </a:solidFill>
+                <a:effectLst/>
+                <a:latin typeface="Microsoft JhengHei" panose="020B0604030504040204" pitchFamily="34" charset="-120"/>
+                <a:ea typeface="Microsoft JhengHei" panose="020B0604030504040204" pitchFamily="34" charset="-120"/>
+              </a:rPr>
+              <a:t>( </a:t>
+            </a:r>
+            <a:r>
+              <a:rPr lang="zh-CN" altLang="en-US" sz="3600" b="1" dirty="0">
+                <a:solidFill>
+                  <a:srgbClr val="660033"/>
+                </a:solidFill>
+                <a:effectLst/>
+                <a:latin typeface="Microsoft JhengHei" panose="020B0604030504040204" pitchFamily="34" charset="-120"/>
+                <a:ea typeface="Microsoft JhengHei" panose="020B0604030504040204" pitchFamily="34" charset="-120"/>
+              </a:rPr>
+              <a:t>副歌</a:t>
+            </a:r>
+            <a:r>
+              <a:rPr lang="en-US" sz="3600" b="1" dirty="0">
+                <a:solidFill>
+                  <a:srgbClr val="660033"/>
+                </a:solidFill>
+                <a:effectLst/>
+                <a:latin typeface="Microsoft JhengHei" panose="020B0604030504040204" pitchFamily="34" charset="-120"/>
+                <a:ea typeface="Microsoft JhengHei" panose="020B0604030504040204" pitchFamily="34" charset="-120"/>
+              </a:rPr>
+              <a:t> )</a:t>
+            </a:r>
+            <a:endParaRPr lang="vi-VN" sz="3600" b="1" dirty="0">
               <a:solidFill>
                 <a:srgbClr val="660033"/>
               </a:solidFill>
-              <a:latin typeface="微軟正黑體" pitchFamily="34" charset="-120"/>
-              <a:ea typeface="微軟正黑體" pitchFamily="34" charset="-120"/>
+              <a:effectLst/>
+              <a:ea typeface="Microsoft JhengHei" panose="020B0604030504040204" pitchFamily="34" charset="-120"/>
             </a:endParaRPr>
           </a:p>
         </p:txBody>
@@ -3479,7 +3543,7 @@
                 <a:latin typeface="微軟正黑體" pitchFamily="34" charset="-120"/>
                 <a:ea typeface="微軟正黑體" pitchFamily="34" charset="-120"/>
               </a:rPr>
-              <a:t>袮</a:t>
+              <a:t>祢</a:t>
             </a:r>
             <a:r>
               <a:rPr lang="zh-TW" altLang="en-US" sz="6400" b="1" dirty="0">
@@ -3511,7 +3575,7 @@
                 <a:latin typeface="微軟正黑體" pitchFamily="34" charset="-120"/>
                 <a:ea typeface="微軟正黑體" pitchFamily="34" charset="-120"/>
               </a:rPr>
-              <a:t>袮</a:t>
+              <a:t>祢</a:t>
             </a:r>
             <a:r>
               <a:rPr lang="zh-TW" altLang="en-US" sz="6400" b="1" dirty="0">
@@ -3542,7 +3606,7 @@
         <p:spPr>
           <a:xfrm>
             <a:off x="0" y="5061182"/>
-            <a:ext cx="12192000" cy="830997"/>
+            <a:ext cx="12192000" cy="646331"/>
           </a:xfrm>
           <a:prstGeom prst="rect">
             <a:avLst/>
@@ -3557,19 +3621,44 @@
           <a:p>
             <a:pPr algn="ctr"/>
             <a:r>
-              <a:rPr lang="en-US" sz="4800" b="1" dirty="0">
+              <a:rPr lang="en-US" sz="3600" b="1" dirty="0">
                 <a:solidFill>
                   <a:srgbClr val="660033"/>
                 </a:solidFill>
                 <a:effectLst/>
-              </a:rPr>
-              <a:t>( 1 )</a:t>
-            </a:r>
-            <a:endParaRPr lang="vi-VN" sz="4800" b="1" dirty="0">
+                <a:latin typeface="Microsoft JhengHei" panose="020B0604030504040204" pitchFamily="34" charset="-120"/>
+                <a:ea typeface="Microsoft JhengHei" panose="020B0604030504040204" pitchFamily="34" charset="-120"/>
+              </a:rPr>
+              <a:t>( </a:t>
+            </a:r>
+            <a:r>
+              <a:rPr lang="zh-CN" altLang="en-US" sz="3600" b="1" dirty="0">
+                <a:solidFill>
+                  <a:srgbClr val="660033"/>
+                </a:solidFill>
+                <a:effectLst/>
+                <a:latin typeface="Microsoft JhengHei" panose="020B0604030504040204" pitchFamily="34" charset="-120"/>
+                <a:ea typeface="Microsoft JhengHei" panose="020B0604030504040204" pitchFamily="34" charset="-120"/>
+              </a:rPr>
+              <a:t>正歌 </a:t>
+            </a:r>
+            <a:r>
+              <a:rPr lang="en-US" sz="3600" b="1" dirty="0">
+                <a:solidFill>
+                  <a:srgbClr val="660033"/>
+                </a:solidFill>
+                <a:effectLst/>
+                <a:latin typeface="Microsoft JhengHei" panose="020B0604030504040204" pitchFamily="34" charset="-120"/>
+                <a:ea typeface="Microsoft JhengHei" panose="020B0604030504040204" pitchFamily="34" charset="-120"/>
+              </a:rPr>
+              <a:t>1 )</a:t>
+            </a:r>
+            <a:endParaRPr lang="vi-VN" sz="3600" b="1" dirty="0">
               <a:solidFill>
                 <a:srgbClr val="660033"/>
               </a:solidFill>
               <a:effectLst/>
+              <a:ea typeface="Microsoft JhengHei" panose="020B0604030504040204" pitchFamily="34" charset="-120"/>
             </a:endParaRPr>
           </a:p>
         </p:txBody>
@@ -3637,7 +3726,7 @@
                 <a:latin typeface="微軟正黑體" pitchFamily="34" charset="-120"/>
                 <a:ea typeface="微軟正黑體" pitchFamily="34" charset="-120"/>
               </a:rPr>
-              <a:t>袮</a:t>
+              <a:t>祢</a:t>
             </a:r>
             <a:r>
               <a:rPr lang="zh-TW" altLang="en-US" sz="6400" b="1" dirty="0">
@@ -3668,7 +3757,7 @@
         <p:spPr>
           <a:xfrm>
             <a:off x="0" y="5061182"/>
-            <a:ext cx="12192000" cy="830997"/>
+            <a:ext cx="12192000" cy="646331"/>
           </a:xfrm>
           <a:prstGeom prst="rect">
             <a:avLst/>
@@ -3683,19 +3772,40 @@
           <a:p>
             <a:pPr algn="ctr"/>
             <a:r>
-              <a:rPr lang="en-US" sz="4800" b="1" dirty="0">
-                <a:solidFill>
-                  <a:srgbClr val="660033"/>
-                </a:solidFill>
-                <a:effectLst/>
-              </a:rPr>
-              <a:t>( 1 )</a:t>
-            </a:r>
-            <a:endParaRPr lang="vi-VN" sz="4800" b="1" dirty="0">
+              <a:rPr lang="en-US" sz="3600" b="1" dirty="0">
+                <a:solidFill>
+                  <a:srgbClr val="660033"/>
+                </a:solidFill>
+                <a:latin typeface="Microsoft JhengHei" panose="020B0604030504040204" pitchFamily="34" charset="-120"/>
+                <a:ea typeface="Microsoft JhengHei" panose="020B0604030504040204" pitchFamily="34" charset="-120"/>
+              </a:rPr>
+              <a:t>( </a:t>
+            </a:r>
+            <a:r>
+              <a:rPr lang="zh-CN" altLang="en-US" sz="3600" b="1" dirty="0">
+                <a:solidFill>
+                  <a:srgbClr val="660033"/>
+                </a:solidFill>
+                <a:latin typeface="Microsoft JhengHei" panose="020B0604030504040204" pitchFamily="34" charset="-120"/>
+                <a:ea typeface="Microsoft JhengHei" panose="020B0604030504040204" pitchFamily="34" charset="-120"/>
+              </a:rPr>
+              <a:t>正歌 </a:t>
+            </a:r>
+            <a:r>
+              <a:rPr lang="en-US" sz="3600" b="1" dirty="0">
+                <a:solidFill>
+                  <a:srgbClr val="660033"/>
+                </a:solidFill>
+                <a:latin typeface="Microsoft JhengHei" panose="020B0604030504040204" pitchFamily="34" charset="-120"/>
+                <a:ea typeface="Microsoft JhengHei" panose="020B0604030504040204" pitchFamily="34" charset="-120"/>
+              </a:rPr>
+              <a:t>1 )</a:t>
+            </a:r>
+            <a:endParaRPr lang="vi-VN" sz="3600" b="1" dirty="0">
               <a:solidFill>
                 <a:srgbClr val="660033"/>
               </a:solidFill>
-              <a:effectLst/>
+              <a:ea typeface="Microsoft JhengHei" panose="020B0604030504040204" pitchFamily="34" charset="-120"/>
             </a:endParaRPr>
           </a:p>
         </p:txBody>
@@ -3763,7 +3873,7 @@
                 <a:latin typeface="微軟正黑體" pitchFamily="34" charset="-120"/>
                 <a:ea typeface="微軟正黑體" pitchFamily="34" charset="-120"/>
               </a:rPr>
-              <a:t>袮</a:t>
+              <a:t>祢</a:t>
             </a:r>
             <a:r>
               <a:rPr lang="zh-TW" altLang="en-US" sz="6400" b="1" dirty="0">
@@ -3815,27 +3925,17 @@
                 <a:latin typeface="微軟正黑體" pitchFamily="34" charset="-120"/>
                 <a:ea typeface="微軟正黑體" pitchFamily="34" charset="-120"/>
               </a:rPr>
-              <a:t>我</a:t>
-            </a:r>
-            <a:r>
-              <a:rPr lang="zh-TW" altLang="en-US" sz="6400" b="1" dirty="0">
+              <a:t>我怎能放棄</a:t>
+            </a:r>
+            <a:r>
+              <a:rPr lang="zh-CN" altLang="en-US" sz="6400" b="1" dirty="0">
                 <a:solidFill>
                   <a:srgbClr val="660033"/>
                 </a:solidFill>
                 <a:latin typeface="微軟正黑體" pitchFamily="34" charset="-120"/>
                 <a:ea typeface="微軟正黑體" pitchFamily="34" charset="-120"/>
               </a:rPr>
-              <a:t>怎能放棄</a:t>
-            </a:r>
-            <a:r>
-              <a:rPr lang="zh-CN" altLang="en-US" sz="6400" b="1" dirty="0">
-                <a:solidFill>
-                  <a:srgbClr val="660033"/>
-                </a:solidFill>
-                <a:latin typeface="微軟正黑體" pitchFamily="34" charset="-120"/>
-                <a:ea typeface="微軟正黑體" pitchFamily="34" charset="-120"/>
-              </a:rPr>
-              <a:t>袮</a:t>
+              <a:t>祢</a:t>
             </a:r>
             <a:r>
               <a:rPr lang="zh-TW" altLang="en-US" sz="6400" b="1" dirty="0">
@@ -3866,7 +3966,7 @@
         <p:spPr>
           <a:xfrm>
             <a:off x="0" y="5061182"/>
-            <a:ext cx="12192000" cy="830997"/>
+            <a:ext cx="12192000" cy="646331"/>
           </a:xfrm>
           <a:prstGeom prst="rect">
             <a:avLst/>
@@ -3881,19 +3981,40 @@
           <a:p>
             <a:pPr algn="ctr"/>
             <a:r>
-              <a:rPr lang="en-US" sz="4800" b="1" dirty="0">
-                <a:solidFill>
-                  <a:srgbClr val="660033"/>
-                </a:solidFill>
-                <a:effectLst/>
-              </a:rPr>
-              <a:t>( 1 )</a:t>
-            </a:r>
-            <a:endParaRPr lang="vi-VN" sz="4800" b="1" dirty="0">
+              <a:rPr lang="en-US" sz="3600" b="1" dirty="0">
+                <a:solidFill>
+                  <a:srgbClr val="660033"/>
+                </a:solidFill>
+                <a:latin typeface="Microsoft JhengHei" panose="020B0604030504040204" pitchFamily="34" charset="-120"/>
+                <a:ea typeface="Microsoft JhengHei" panose="020B0604030504040204" pitchFamily="34" charset="-120"/>
+              </a:rPr>
+              <a:t>( </a:t>
+            </a:r>
+            <a:r>
+              <a:rPr lang="zh-CN" altLang="en-US" sz="3600" b="1" dirty="0">
+                <a:solidFill>
+                  <a:srgbClr val="660033"/>
+                </a:solidFill>
+                <a:latin typeface="Microsoft JhengHei" panose="020B0604030504040204" pitchFamily="34" charset="-120"/>
+                <a:ea typeface="Microsoft JhengHei" panose="020B0604030504040204" pitchFamily="34" charset="-120"/>
+              </a:rPr>
+              <a:t>正歌 </a:t>
+            </a:r>
+            <a:r>
+              <a:rPr lang="en-US" sz="3600" b="1" dirty="0">
+                <a:solidFill>
+                  <a:srgbClr val="660033"/>
+                </a:solidFill>
+                <a:latin typeface="Microsoft JhengHei" panose="020B0604030504040204" pitchFamily="34" charset="-120"/>
+                <a:ea typeface="Microsoft JhengHei" panose="020B0604030504040204" pitchFamily="34" charset="-120"/>
+              </a:rPr>
+              <a:t>1 )</a:t>
+            </a:r>
+            <a:endParaRPr lang="vi-VN" sz="3600" b="1" dirty="0">
               <a:solidFill>
                 <a:srgbClr val="660033"/>
               </a:solidFill>
-              <a:effectLst/>
+              <a:ea typeface="Microsoft JhengHei" panose="020B0604030504040204" pitchFamily="34" charset="-120"/>
             </a:endParaRPr>
           </a:p>
         </p:txBody>
@@ -3961,7 +4082,7 @@
                 <a:latin typeface="微軟正黑體" pitchFamily="34" charset="-120"/>
                 <a:ea typeface="微軟正黑體" pitchFamily="34" charset="-120"/>
               </a:rPr>
-              <a:t>袮</a:t>
+              <a:t>祢</a:t>
             </a:r>
             <a:r>
               <a:rPr lang="zh-TW" altLang="en-US" sz="6400" b="1" dirty="0">
@@ -3992,7 +4113,7 @@
         <p:spPr>
           <a:xfrm>
             <a:off x="0" y="5061182"/>
-            <a:ext cx="12192000" cy="830997"/>
+            <a:ext cx="12192000" cy="646331"/>
           </a:xfrm>
           <a:prstGeom prst="rect">
             <a:avLst/>
@@ -4007,19 +4128,40 @@
           <a:p>
             <a:pPr algn="ctr"/>
             <a:r>
-              <a:rPr lang="en-US" sz="4800" b="1" dirty="0">
-                <a:solidFill>
-                  <a:srgbClr val="660033"/>
-                </a:solidFill>
-                <a:effectLst/>
-              </a:rPr>
-              <a:t>( 1 )</a:t>
-            </a:r>
-            <a:endParaRPr lang="vi-VN" sz="4800" b="1" dirty="0">
+              <a:rPr lang="en-US" sz="3600" b="1" dirty="0">
+                <a:solidFill>
+                  <a:srgbClr val="660033"/>
+                </a:solidFill>
+                <a:latin typeface="Microsoft JhengHei" panose="020B0604030504040204" pitchFamily="34" charset="-120"/>
+                <a:ea typeface="Microsoft JhengHei" panose="020B0604030504040204" pitchFamily="34" charset="-120"/>
+              </a:rPr>
+              <a:t>( </a:t>
+            </a:r>
+            <a:r>
+              <a:rPr lang="zh-CN" altLang="en-US" sz="3600" b="1" dirty="0">
+                <a:solidFill>
+                  <a:srgbClr val="660033"/>
+                </a:solidFill>
+                <a:latin typeface="Microsoft JhengHei" panose="020B0604030504040204" pitchFamily="34" charset="-120"/>
+                <a:ea typeface="Microsoft JhengHei" panose="020B0604030504040204" pitchFamily="34" charset="-120"/>
+              </a:rPr>
+              <a:t>正歌 </a:t>
+            </a:r>
+            <a:r>
+              <a:rPr lang="en-US" sz="3600" b="1" dirty="0">
+                <a:solidFill>
+                  <a:srgbClr val="660033"/>
+                </a:solidFill>
+                <a:latin typeface="Microsoft JhengHei" panose="020B0604030504040204" pitchFamily="34" charset="-120"/>
+                <a:ea typeface="Microsoft JhengHei" panose="020B0604030504040204" pitchFamily="34" charset="-120"/>
+              </a:rPr>
+              <a:t>1 )</a:t>
+            </a:r>
+            <a:endParaRPr lang="vi-VN" sz="3600" b="1" dirty="0">
               <a:solidFill>
                 <a:srgbClr val="660033"/>
               </a:solidFill>
-              <a:effectLst/>
+              <a:ea typeface="Microsoft JhengHei" panose="020B0604030504040204" pitchFamily="34" charset="-120"/>
             </a:endParaRPr>
           </a:p>
         </p:txBody>
@@ -4151,12 +4293,77 @@
               </a:rPr>
               <a:t>配得大讚美</a:t>
             </a:r>
-            <a:endParaRPr lang="zh-TW" altLang="en-US" sz="6400" b="1" dirty="0">
+          </a:p>
+        </p:txBody>
+      </p:sp>
+      <p:sp>
+        <p:nvSpPr>
+          <p:cNvPr id="2" name="TextBox 1">
+            <a:extLst>
+              <a:ext uri="{FF2B5EF4-FFF2-40B4-BE49-F238E27FC236}">
+                <a16:creationId xmlns:a16="http://schemas.microsoft.com/office/drawing/2014/main" id="{C2447F39-871A-7ECF-1E1E-355096BF1745}"/>
+              </a:ext>
+            </a:extLst>
+          </p:cNvPr>
+          <p:cNvSpPr txBox="1"/>
+          <p:nvPr/>
+        </p:nvSpPr>
+        <p:spPr>
+          <a:xfrm>
+            <a:off x="0" y="5061182"/>
+            <a:ext cx="12192000" cy="646331"/>
+          </a:xfrm>
+          <a:prstGeom prst="rect">
+            <a:avLst/>
+          </a:prstGeom>
+          <a:noFill/>
+        </p:spPr>
+        <p:txBody>
+          <a:bodyPr wrap="square" rtlCol="0">
+            <a:spAutoFit/>
+          </a:bodyPr>
+          <a:lstStyle/>
+          <a:p>
+            <a:pPr algn="ctr"/>
+            <a:r>
+              <a:rPr lang="en-US" sz="3600" b="1" dirty="0">
+                <a:solidFill>
+                  <a:srgbClr val="660033"/>
+                </a:solidFill>
+                <a:effectLst/>
+                <a:latin typeface="Microsoft JhengHei" panose="020B0604030504040204" pitchFamily="34" charset="-120"/>
+                <a:ea typeface="Microsoft JhengHei" panose="020B0604030504040204" pitchFamily="34" charset="-120"/>
+              </a:rPr>
+              <a:t>( </a:t>
+            </a:r>
+            <a:r>
+              <a:rPr lang="zh-CN" altLang="en-US" sz="3600" b="1" dirty="0">
+                <a:solidFill>
+                  <a:srgbClr val="660033"/>
+                </a:solidFill>
+                <a:effectLst/>
+                <a:latin typeface="Microsoft JhengHei" panose="020B0604030504040204" pitchFamily="34" charset="-120"/>
+                <a:ea typeface="Microsoft JhengHei" panose="020B0604030504040204" pitchFamily="34" charset="-120"/>
+              </a:rPr>
+              <a:t>副歌</a:t>
+            </a:r>
+            <a:r>
+              <a:rPr lang="en-US" sz="3600" b="1" dirty="0">
+                <a:solidFill>
+                  <a:srgbClr val="660033"/>
+                </a:solidFill>
+                <a:effectLst/>
+                <a:latin typeface="Microsoft JhengHei" panose="020B0604030504040204" pitchFamily="34" charset="-120"/>
+                <a:ea typeface="Microsoft JhengHei" panose="020B0604030504040204" pitchFamily="34" charset="-120"/>
+              </a:rPr>
+              <a:t> )</a:t>
+            </a:r>
+            <a:endParaRPr lang="vi-VN" sz="3600" b="1" dirty="0">
               <a:solidFill>
                 <a:srgbClr val="660033"/>
               </a:solidFill>
-              <a:latin typeface="微軟正黑體" pitchFamily="34" charset="-120"/>
-              <a:ea typeface="微軟正黑體" pitchFamily="34" charset="-120"/>
+              <a:effectLst/>
+              <a:ea typeface="Microsoft JhengHei" panose="020B0604030504040204" pitchFamily="34" charset="-120"/>
             </a:endParaRPr>
           </a:p>
         </p:txBody>
@@ -4267,7 +4474,7 @@
         <p:spPr>
           <a:xfrm>
             <a:off x="0" y="5061182"/>
-            <a:ext cx="12192000" cy="830997"/>
+            <a:ext cx="12192000" cy="646331"/>
           </a:xfrm>
           <a:prstGeom prst="rect">
             <a:avLst/>
@@ -4282,19 +4489,40 @@
           <a:p>
             <a:pPr algn="ctr"/>
             <a:r>
-              <a:rPr lang="en-US" sz="4800" b="1" dirty="0">
-                <a:solidFill>
-                  <a:srgbClr val="660033"/>
-                </a:solidFill>
-                <a:effectLst/>
-              </a:rPr>
-              <a:t>( 2 )</a:t>
-            </a:r>
-            <a:endParaRPr lang="vi-VN" sz="4800" b="1" dirty="0">
+              <a:rPr lang="en-US" sz="3600" b="1" dirty="0">
+                <a:solidFill>
+                  <a:srgbClr val="660033"/>
+                </a:solidFill>
+                <a:latin typeface="Microsoft JhengHei" panose="020B0604030504040204" pitchFamily="34" charset="-120"/>
+                <a:ea typeface="Microsoft JhengHei" panose="020B0604030504040204" pitchFamily="34" charset="-120"/>
+              </a:rPr>
+              <a:t>( </a:t>
+            </a:r>
+            <a:r>
+              <a:rPr lang="zh-CN" altLang="en-US" sz="3600" b="1" dirty="0">
+                <a:solidFill>
+                  <a:srgbClr val="660033"/>
+                </a:solidFill>
+                <a:latin typeface="Microsoft JhengHei" panose="020B0604030504040204" pitchFamily="34" charset="-120"/>
+                <a:ea typeface="Microsoft JhengHei" panose="020B0604030504040204" pitchFamily="34" charset="-120"/>
+              </a:rPr>
+              <a:t>正歌 </a:t>
+            </a:r>
+            <a:r>
+              <a:rPr lang="en-US" sz="3600" b="1" dirty="0">
+                <a:solidFill>
+                  <a:srgbClr val="660033"/>
+                </a:solidFill>
+                <a:latin typeface="Microsoft JhengHei" panose="020B0604030504040204" pitchFamily="34" charset="-120"/>
+                <a:ea typeface="Microsoft JhengHei" panose="020B0604030504040204" pitchFamily="34" charset="-120"/>
+              </a:rPr>
+              <a:t>2 )</a:t>
+            </a:r>
+            <a:endParaRPr lang="vi-VN" sz="3600" b="1" dirty="0">
               <a:solidFill>
                 <a:srgbClr val="660033"/>
               </a:solidFill>
-              <a:effectLst/>
+              <a:ea typeface="Microsoft JhengHei" panose="020B0604030504040204" pitchFamily="34" charset="-120"/>
             </a:endParaRPr>
           </a:p>
         </p:txBody>
@@ -4362,7 +4590,7 @@
                 <a:latin typeface="微軟正黑體" pitchFamily="34" charset="-120"/>
                 <a:ea typeface="微軟正黑體" pitchFamily="34" charset="-120"/>
               </a:rPr>
-              <a:t>袮</a:t>
+              <a:t>祢</a:t>
             </a:r>
             <a:r>
               <a:rPr lang="zh-TW" altLang="en-US" sz="6400" b="1" dirty="0">
@@ -4393,7 +4621,7 @@
         <p:spPr>
           <a:xfrm>
             <a:off x="0" y="5061182"/>
-            <a:ext cx="12192000" cy="830997"/>
+            <a:ext cx="12192000" cy="646331"/>
           </a:xfrm>
           <a:prstGeom prst="rect">
             <a:avLst/>
@@ -4408,19 +4636,40 @@
           <a:p>
             <a:pPr algn="ctr"/>
             <a:r>
-              <a:rPr lang="en-US" sz="4800" b="1" dirty="0">
-                <a:solidFill>
-                  <a:srgbClr val="660033"/>
-                </a:solidFill>
-                <a:effectLst/>
-              </a:rPr>
-              <a:t>( 2 )</a:t>
-            </a:r>
-            <a:endParaRPr lang="vi-VN" sz="4800" b="1" dirty="0">
+              <a:rPr lang="en-US" sz="3600" b="1" dirty="0">
+                <a:solidFill>
+                  <a:srgbClr val="660033"/>
+                </a:solidFill>
+                <a:latin typeface="Microsoft JhengHei" panose="020B0604030504040204" pitchFamily="34" charset="-120"/>
+                <a:ea typeface="Microsoft JhengHei" panose="020B0604030504040204" pitchFamily="34" charset="-120"/>
+              </a:rPr>
+              <a:t>( </a:t>
+            </a:r>
+            <a:r>
+              <a:rPr lang="zh-CN" altLang="en-US" sz="3600" b="1" dirty="0">
+                <a:solidFill>
+                  <a:srgbClr val="660033"/>
+                </a:solidFill>
+                <a:latin typeface="Microsoft JhengHei" panose="020B0604030504040204" pitchFamily="34" charset="-120"/>
+                <a:ea typeface="Microsoft JhengHei" panose="020B0604030504040204" pitchFamily="34" charset="-120"/>
+              </a:rPr>
+              <a:t>正歌 </a:t>
+            </a:r>
+            <a:r>
+              <a:rPr lang="en-US" sz="3600" b="1" dirty="0">
+                <a:solidFill>
+                  <a:srgbClr val="660033"/>
+                </a:solidFill>
+                <a:latin typeface="Microsoft JhengHei" panose="020B0604030504040204" pitchFamily="34" charset="-120"/>
+                <a:ea typeface="Microsoft JhengHei" panose="020B0604030504040204" pitchFamily="34" charset="-120"/>
+              </a:rPr>
+              <a:t>2 )</a:t>
+            </a:r>
+            <a:endParaRPr lang="vi-VN" sz="3600" b="1" dirty="0">
               <a:solidFill>
                 <a:srgbClr val="660033"/>
               </a:solidFill>
-              <a:effectLst/>
+              <a:ea typeface="Microsoft JhengHei" panose="020B0604030504040204" pitchFamily="34" charset="-120"/>
             </a:endParaRPr>
           </a:p>
         </p:txBody>
@@ -4498,7 +4747,7 @@
                 <a:latin typeface="微軟正黑體" pitchFamily="34" charset="-120"/>
                 <a:ea typeface="微軟正黑體" pitchFamily="34" charset="-120"/>
               </a:rPr>
-              <a:t>袮</a:t>
+              <a:t>祢</a:t>
             </a:r>
             <a:r>
               <a:rPr lang="zh-TW" altLang="en-US" sz="6400" b="1" dirty="0">
@@ -4540,7 +4789,7 @@
                 <a:latin typeface="微軟正黑體" pitchFamily="34" charset="-120"/>
                 <a:ea typeface="微軟正黑體" pitchFamily="34" charset="-120"/>
               </a:rPr>
-              <a:t>袮</a:t>
+              <a:t>祢</a:t>
             </a:r>
             <a:r>
               <a:rPr lang="zh-TW" altLang="en-US" sz="6400" b="1" dirty="0">
@@ -4571,7 +4820,7 @@
         <p:spPr>
           <a:xfrm>
             <a:off x="0" y="5061182"/>
-            <a:ext cx="12192000" cy="830997"/>
+            <a:ext cx="12192000" cy="646331"/>
           </a:xfrm>
           <a:prstGeom prst="rect">
             <a:avLst/>
@@ -4586,19 +4835,40 @@
           <a:p>
             <a:pPr algn="ctr"/>
             <a:r>
-              <a:rPr lang="en-US" sz="4800" b="1" dirty="0">
-                <a:solidFill>
-                  <a:srgbClr val="660033"/>
-                </a:solidFill>
-                <a:effectLst/>
-              </a:rPr>
-              <a:t>( 2 )</a:t>
-            </a:r>
-            <a:endParaRPr lang="vi-VN" sz="4800" b="1" dirty="0">
+              <a:rPr lang="en-US" sz="3600" b="1" dirty="0">
+                <a:solidFill>
+                  <a:srgbClr val="660033"/>
+                </a:solidFill>
+                <a:latin typeface="Microsoft JhengHei" panose="020B0604030504040204" pitchFamily="34" charset="-120"/>
+                <a:ea typeface="Microsoft JhengHei" panose="020B0604030504040204" pitchFamily="34" charset="-120"/>
+              </a:rPr>
+              <a:t>( </a:t>
+            </a:r>
+            <a:r>
+              <a:rPr lang="zh-CN" altLang="en-US" sz="3600" b="1" dirty="0">
+                <a:solidFill>
+                  <a:srgbClr val="660033"/>
+                </a:solidFill>
+                <a:latin typeface="Microsoft JhengHei" panose="020B0604030504040204" pitchFamily="34" charset="-120"/>
+                <a:ea typeface="Microsoft JhengHei" panose="020B0604030504040204" pitchFamily="34" charset="-120"/>
+              </a:rPr>
+              <a:t>正歌 </a:t>
+            </a:r>
+            <a:r>
+              <a:rPr lang="en-US" sz="3600" b="1" dirty="0">
+                <a:solidFill>
+                  <a:srgbClr val="660033"/>
+                </a:solidFill>
+                <a:latin typeface="Microsoft JhengHei" panose="020B0604030504040204" pitchFamily="34" charset="-120"/>
+                <a:ea typeface="Microsoft JhengHei" panose="020B0604030504040204" pitchFamily="34" charset="-120"/>
+              </a:rPr>
+              <a:t>2 )</a:t>
+            </a:r>
+            <a:endParaRPr lang="vi-VN" sz="3600" b="1" dirty="0">
               <a:solidFill>
                 <a:srgbClr val="660033"/>
               </a:solidFill>
-              <a:effectLst/>
+              <a:ea typeface="Microsoft JhengHei" panose="020B0604030504040204" pitchFamily="34" charset="-120"/>
             </a:endParaRPr>
           </a:p>
         </p:txBody>

--- a/你是我的一切.pptx
+++ b/你是我的一切.pptx
@@ -313,7 +313,7 @@
             <a:fld id="{F4C0ED8C-69B4-47DE-B78F-544662AD9AC7}" type="datetimeFigureOut">
               <a:rPr lang="zh-TW" altLang="en-US" smtClean="0"/>
               <a:pPr/>
-              <a:t>2024/8/24</a:t>
+              <a:t>2025/8/9</a:t>
             </a:fld>
             <a:endParaRPr lang="zh-TW" altLang="en-US"/>
           </a:p>
@@ -478,7 +478,7 @@
             <a:fld id="{F4C0ED8C-69B4-47DE-B78F-544662AD9AC7}" type="datetimeFigureOut">
               <a:rPr lang="zh-TW" altLang="en-US" smtClean="0"/>
               <a:pPr/>
-              <a:t>2024/8/24</a:t>
+              <a:t>2025/8/9</a:t>
             </a:fld>
             <a:endParaRPr lang="zh-TW" altLang="en-US"/>
           </a:p>
@@ -653,7 +653,7 @@
             <a:fld id="{F4C0ED8C-69B4-47DE-B78F-544662AD9AC7}" type="datetimeFigureOut">
               <a:rPr lang="zh-TW" altLang="en-US" smtClean="0"/>
               <a:pPr/>
-              <a:t>2024/8/24</a:t>
+              <a:t>2025/8/9</a:t>
             </a:fld>
             <a:endParaRPr lang="zh-TW" altLang="en-US"/>
           </a:p>
@@ -818,7 +818,7 @@
             <a:fld id="{F4C0ED8C-69B4-47DE-B78F-544662AD9AC7}" type="datetimeFigureOut">
               <a:rPr lang="zh-TW" altLang="en-US" smtClean="0"/>
               <a:pPr/>
-              <a:t>2024/8/24</a:t>
+              <a:t>2025/8/9</a:t>
             </a:fld>
             <a:endParaRPr lang="zh-TW" altLang="en-US"/>
           </a:p>
@@ -1060,7 +1060,7 @@
             <a:fld id="{F4C0ED8C-69B4-47DE-B78F-544662AD9AC7}" type="datetimeFigureOut">
               <a:rPr lang="zh-TW" altLang="en-US" smtClean="0"/>
               <a:pPr/>
-              <a:t>2024/8/24</a:t>
+              <a:t>2025/8/9</a:t>
             </a:fld>
             <a:endParaRPr lang="zh-TW" altLang="en-US"/>
           </a:p>
@@ -1342,7 +1342,7 @@
             <a:fld id="{F4C0ED8C-69B4-47DE-B78F-544662AD9AC7}" type="datetimeFigureOut">
               <a:rPr lang="zh-TW" altLang="en-US" smtClean="0"/>
               <a:pPr/>
-              <a:t>2024/8/24</a:t>
+              <a:t>2025/8/9</a:t>
             </a:fld>
             <a:endParaRPr lang="zh-TW" altLang="en-US"/>
           </a:p>
@@ -1758,7 +1758,7 @@
             <a:fld id="{F4C0ED8C-69B4-47DE-B78F-544662AD9AC7}" type="datetimeFigureOut">
               <a:rPr lang="zh-TW" altLang="en-US" smtClean="0"/>
               <a:pPr/>
-              <a:t>2024/8/24</a:t>
+              <a:t>2025/8/9</a:t>
             </a:fld>
             <a:endParaRPr lang="zh-TW" altLang="en-US"/>
           </a:p>
@@ -1872,7 +1872,7 @@
             <a:fld id="{F4C0ED8C-69B4-47DE-B78F-544662AD9AC7}" type="datetimeFigureOut">
               <a:rPr lang="zh-TW" altLang="en-US" smtClean="0"/>
               <a:pPr/>
-              <a:t>2024/8/24</a:t>
+              <a:t>2025/8/9</a:t>
             </a:fld>
             <a:endParaRPr lang="zh-TW" altLang="en-US"/>
           </a:p>
@@ -1964,7 +1964,7 @@
             <a:fld id="{F4C0ED8C-69B4-47DE-B78F-544662AD9AC7}" type="datetimeFigureOut">
               <a:rPr lang="zh-TW" altLang="en-US" smtClean="0"/>
               <a:pPr/>
-              <a:t>2024/8/24</a:t>
+              <a:t>2025/8/9</a:t>
             </a:fld>
             <a:endParaRPr lang="zh-TW" altLang="en-US"/>
           </a:p>
@@ -2236,7 +2236,7 @@
             <a:fld id="{F4C0ED8C-69B4-47DE-B78F-544662AD9AC7}" type="datetimeFigureOut">
               <a:rPr lang="zh-TW" altLang="en-US" smtClean="0"/>
               <a:pPr/>
-              <a:t>2024/8/24</a:t>
+              <a:t>2025/8/9</a:t>
             </a:fld>
             <a:endParaRPr lang="zh-TW" altLang="en-US"/>
           </a:p>
@@ -2488,7 +2488,7 @@
             <a:fld id="{F4C0ED8C-69B4-47DE-B78F-544662AD9AC7}" type="datetimeFigureOut">
               <a:rPr lang="zh-TW" altLang="en-US" smtClean="0"/>
               <a:pPr/>
-              <a:t>2024/8/24</a:t>
+              <a:t>2025/8/9</a:t>
             </a:fld>
             <a:endParaRPr lang="zh-TW" altLang="en-US"/>
           </a:p>
@@ -2701,7 +2701,7 @@
             <a:fld id="{F4C0ED8C-69B4-47DE-B78F-544662AD9AC7}" type="datetimeFigureOut">
               <a:rPr lang="zh-TW" altLang="en-US" smtClean="0"/>
               <a:pPr/>
-              <a:t>2024/8/24</a:t>
+              <a:t>2025/8/9</a:t>
             </a:fld>
             <a:endParaRPr lang="zh-TW" altLang="en-US"/>
           </a:p>
@@ -3883,7 +3883,27 @@
                 <a:latin typeface="微軟正黑體" pitchFamily="34" charset="-120"/>
                 <a:ea typeface="微軟正黑體" pitchFamily="34" charset="-120"/>
               </a:rPr>
-              <a:t>好比珍貴的</a:t>
+              <a:t>好比</a:t>
+            </a:r>
+            <a:r>
+              <a:rPr lang="zh-CN" altLang="en-US" sz="6400" b="1">
+                <a:solidFill>
+                  <a:srgbClr val="660033"/>
+                </a:solidFill>
+                <a:latin typeface="微軟正黑體" pitchFamily="34" charset="-120"/>
+                <a:ea typeface="微軟正黑體" pitchFamily="34" charset="-120"/>
+              </a:rPr>
+              <a:t>貴重</a:t>
+            </a:r>
+            <a:r>
+              <a:rPr lang="zh-TW" altLang="en-US" sz="6400" b="1">
+                <a:solidFill>
+                  <a:srgbClr val="660033"/>
+                </a:solidFill>
+                <a:latin typeface="微軟正黑體" pitchFamily="34" charset="-120"/>
+                <a:ea typeface="微軟正黑體" pitchFamily="34" charset="-120"/>
+              </a:rPr>
+              <a:t>的</a:t>
             </a:r>
             <a:r>
               <a:rPr lang="zh-CN" altLang="en-US" sz="6400" b="1" dirty="0">
